--- a/curso/pptx/S77.pptx
+++ b/curso/pptx/S77.pptx
@@ -5151,7 +5151,7 @@
                 </a:solidFill>
                 <a:latin typeface="Nunito Sans"/>
               </a:rPr>
-              <a:t>No contestar en caliente:</a:t>
+              <a:t>不要在气头上回应：</a:t>
             </a:r>
             <a:r>
               <a:rPr sz="2800" b="0">
@@ -5160,7 +5160,7 @@
                 </a:solidFill>
                 <a:latin typeface="Nunito Sans"/>
               </a:rPr>
-              <a:t> nombrar, esperar y preguntar.</a:t>
+              <a:t>说出来，等一等，再提问。</a:t>
             </a:r>
           </a:p>
           <a:p>
@@ -5185,7 +5185,7 @@
                 </a:solidFill>
                 <a:latin typeface="Nunito Sans"/>
               </a:rPr>
-              <a:t>No reenviar:</a:t>
+              <a:t>不要转发：</a:t>
             </a:r>
             <a:r>
               <a:rPr sz="2800" b="0">
@@ -5194,7 +5194,7 @@
                 </a:solidFill>
                 <a:latin typeface="Nunito Sans"/>
               </a:rPr>
-              <a:t> si no lo difundes, dejas de hacerlo crecer.</a:t>
+              <a:t>如果你不传播，就不会让它变大。</a:t>
             </a:r>
           </a:p>
           <a:p>
@@ -5219,7 +5219,7 @@
                 </a:solidFill>
                 <a:latin typeface="Nunito Sans"/>
               </a:rPr>
-              <a:t>Guardar pruebas,</a:t>
+              <a:t>保存证据，</a:t>
             </a:r>
             <a:r>
               <a:rPr sz="2800" b="0">
@@ -5228,7 +5228,7 @@
                 </a:solidFill>
                 <a:latin typeface="Nunito Sans"/>
               </a:rPr>
-              <a:t> bloquear y denunciar en la propia aplicación.</a:t>
+              <a:t>拉黑，并在应用内举报。</a:t>
             </a:r>
           </a:p>
           <a:p>
@@ -5253,7 +5253,7 @@
                 </a:solidFill>
                 <a:latin typeface="Nunito Sans"/>
               </a:rPr>
-              <a:t>Contarlo</a:t>
+              <a:t>告诉</a:t>
             </a:r>
             <a:r>
               <a:rPr sz="2800" b="0">
@@ -5262,7 +5262,7 @@
                 </a:solidFill>
                 <a:latin typeface="Nunito Sans"/>
               </a:rPr>
-              <a:t> a un adulto de confianza. También existe el teléfono </a:t>
+              <a:t>一个值得信任的大人。也有免费的电话</a:t>
             </a:r>
             <a:r>
               <a:rPr sz="2800" b="1">
@@ -5280,7 +5280,7 @@
                 </a:solidFill>
                 <a:latin typeface="Nunito Sans"/>
               </a:rPr>
-              <a:t> (INCIBE), gratuito.</a:t>
+              <a:t>（INCIBE）。</a:t>
             </a:r>
           </a:p>
         </p:txBody>
@@ -7004,7 +7004,7 @@
                 </a:solidFill>
                 <a:latin typeface="Nunito Sans"/>
               </a:rPr>
-              <a:t>Sin cara:</a:t>
+              <a:t>看不到脸：</a:t>
             </a:r>
             <a:r>
               <a:rPr sz="2800" b="0">
@@ -7013,7 +7013,7 @@
                 </a:solidFill>
                 <a:latin typeface="Nunito Sans"/>
               </a:rPr>
-              <a:t> no ves si el otro se ríe o llora. Falta el tono.</a:t>
+              <a:t>你看不到对方是在笑还是在哭。缺少语气。</a:t>
             </a:r>
           </a:p>
           <a:p>
@@ -7038,7 +7038,7 @@
                 </a:solidFill>
                 <a:latin typeface="Nunito Sans"/>
               </a:rPr>
-              <a:t>Anonimato:</a:t>
+              <a:t>匿名：</a:t>
             </a:r>
             <a:r>
               <a:rPr sz="2800" b="0">
@@ -7047,7 +7047,7 @@
                 </a:solidFill>
                 <a:latin typeface="Nunito Sans"/>
               </a:rPr>
-              <a:t> detrás de una cuenta falsa, algunos se atreven a más.</a:t>
+              <a:t>躲在一个假账号后面，有些人敢做得更过分。</a:t>
             </a:r>
           </a:p>
           <a:p>
@@ -7072,7 +7072,7 @@
                 </a:solidFill>
                 <a:latin typeface="Nunito Sans"/>
               </a:rPr>
-              <a:t>Captura:</a:t>
+              <a:t>截图：</a:t>
             </a:r>
             <a:r>
               <a:rPr sz="2800" b="0">
@@ -7081,7 +7081,7 @@
                 </a:solidFill>
                 <a:latin typeface="Nunito Sans"/>
               </a:rPr>
-              <a:t> todo queda guardado y se puede reenviar, recortar o sacar de contexto.</a:t>
+              <a:t>一切都被保存下来，可以转发、截取，或者断章取义。</a:t>
             </a:r>
           </a:p>
           <a:p>
@@ -7106,7 +7106,7 @@
                 </a:solidFill>
                 <a:latin typeface="Nunito Sans"/>
               </a:rPr>
-              <a:t>Público:</a:t>
+              <a:t>公开：</a:t>
             </a:r>
             <a:r>
               <a:rPr sz="2800" b="0">
@@ -7115,7 +7115,7 @@
                 </a:solidFill>
                 <a:latin typeface="Nunito Sans"/>
               </a:rPr>
-              <a:t> lo ve mucha gente, y cada «me gusta» anima a seguir.</a:t>
+              <a:t>很多人看到，而且每一个“点赞”都在鼓励继续下去。</a:t>
             </a:r>
           </a:p>
         </p:txBody>
@@ -7343,22 +7343,22 @@
               <a:t>• </a:t>
             </a:r>
             <a:r>
+              <a:rPr sz="2800" b="0">
+                <a:solidFill>
+                  <a:srgbClr val="1F2A44"/>
+                </a:solidFill>
+                <a:latin typeface="Nunito Sans"/>
+              </a:rPr>
+              <a:t>有伤害的</a:t>
+            </a:r>
+            <a:r>
               <a:rPr sz="2800" b="1">
                 <a:solidFill>
                   <a:srgbClr val="1F2A44"/>
                 </a:solidFill>
                 <a:latin typeface="Nunito Sans"/>
               </a:rPr>
-              <a:t>Intención</a:t>
-            </a:r>
-            <a:r>
-              <a:rPr sz="2800" b="0">
-                <a:solidFill>
-                  <a:srgbClr val="1F2A44"/>
-                </a:solidFill>
-                <a:latin typeface="Nunito Sans"/>
-              </a:rPr>
-              <a:t> de hacer daño</a:t>
+              <a:t>意图</a:t>
             </a:r>
           </a:p>
           <a:p>
@@ -7383,7 +7383,7 @@
                 </a:solidFill>
                 <a:latin typeface="Nunito Sans"/>
               </a:rPr>
-              <a:t>Repetición:</a:t>
+              <a:t>重复：</a:t>
             </a:r>
             <a:r>
               <a:rPr sz="2800" b="0">
@@ -7392,7 +7392,7 @@
                 </a:solidFill>
                 <a:latin typeface="Nunito Sans"/>
               </a:rPr>
-              <a:t> una publicación puede dañar una y otra vez</a:t>
+              <a:t>一条发布的内容可以一次又一次地伤害人</a:t>
             </a:r>
           </a:p>
           <a:p>
@@ -7417,7 +7417,7 @@
                 </a:solidFill>
                 <a:latin typeface="Nunito Sans"/>
               </a:rPr>
-              <a:t>Desequilibrio:</a:t>
+              <a:t>不平衡：</a:t>
             </a:r>
             <a:r>
               <a:rPr sz="2800" b="0">
@@ -7426,7 +7426,7 @@
                 </a:solidFill>
                 <a:latin typeface="Nunito Sans"/>
               </a:rPr>
-              <a:t> la víctima no puede defenderse fácilmente</a:t>
+              <a:t>受害者不容易为自己辩护</a:t>
             </a:r>
           </a:p>
         </p:txBody>

--- a/curso/pptx/S77.pptx
+++ b/curso/pptx/S77.pptx
@@ -4129,7 +4129,7 @@
                 </a:solidFill>
                 <a:latin typeface="Nunito Sans"/>
               </a:rPr>
-              <a:t>奈亚拉生气了，私下给雅斯敏写道：“蕾尔真烦人。”雅斯敏截了图，发到了班级群里。</a:t>
+              <a:t>一个女孩生气了，私下给一个同学写道：“另一个女孩真烦人。”这个同学截了图，发到了班级群里。</a:t>
             </a:r>
           </a:p>
         </p:txBody>
@@ -4177,7 +4177,7 @@
                 </a:solidFill>
                 <a:latin typeface="Nunito Sans"/>
               </a:rPr>
-              <a:t>奈亚拉是在气头上写的（第75课），但是私下写的。</a:t>
+              <a:t>这个女孩是在气头上写的（第75课），但是私下写的。</a:t>
             </a:r>
           </a:p>
           <a:p>
@@ -4202,7 +4202,7 @@
                 </a:solidFill>
                 <a:latin typeface="Nunito Sans"/>
               </a:rPr>
-              <a:t>雅斯敏侵犯了奈亚拉的隐私：这条消息只是写给她一个人的。</a:t>
+              <a:t>这个同学侵犯了这个女孩的隐私：这条消息只是写给她一个人的。</a:t>
             </a:r>
           </a:p>
           <a:p>
@@ -4227,7 +4227,7 @@
                 </a:solidFill>
                 <a:latin typeface="Nunito Sans"/>
               </a:rPr>
-              <a:t>现在全班都读到了，包括蕾尔。没有脸，没有语气，还被保存下来：冲突变大了。</a:t>
+              <a:t>现在全班都读到了，包括另一个女孩。没有脸，没有语气，还被保存下来：冲突变大了。</a:t>
             </a:r>
           </a:p>
           <a:p>
@@ -4438,7 +4438,7 @@
                 </a:solidFill>
                 <a:latin typeface="Nunito Sans"/>
               </a:rPr>
-              <a:t>一个没有头像也没有名字的账号，评论奥马尔的每一张照片：“你这是什么样子”“没人受得了你”。已经这样三个星期了。</a:t>
+              <a:t>一个没有头像也没有名字的账号，评论一个男孩的每一张照片：“你这是什么样子”“没人受得了你”。已经这样三个星期了。</a:t>
             </a:r>
           </a:p>
         </p:txBody>
@@ -4511,7 +4511,7 @@
                 </a:solidFill>
                 <a:latin typeface="Nunito Sans"/>
               </a:rPr>
-              <a:t>重复吗？有：三个星期。不平衡吗？有：奥马尔不知道那是谁。</a:t>
+              <a:t>重复吗？有：三个星期。不平衡吗？有：这个男孩不知道那是谁。</a:t>
             </a:r>
           </a:p>
           <a:p>
@@ -4536,7 +4536,7 @@
                 </a:solidFill>
                 <a:latin typeface="Nunito Sans"/>
               </a:rPr>
-              <a:t>这是网络欺凌。奥马尔不应该在气头上回应：保存截图，拉黑，并举报。</a:t>
+              <a:t>这是网络欺凌。这个男孩不应该在气头上回应：保存截图，拉黑，并举报。</a:t>
             </a:r>
           </a:p>
           <a:p>
@@ -4747,7 +4747,7 @@
                 </a:solidFill>
                 <a:latin typeface="Nunito Sans"/>
               </a:rPr>
-              <a:t>迪伦拍下陈在操场上绊倒的视频，配上搞笑的音乐，发了出去。很多人在笑。迪伦说：“只是个玩笑。”</a:t>
+              <a:t>一个男孩拍下一个同学在操场上绊倒的视频，配上搞笑的音乐，发了出去。很多人在笑。这个男孩说：“只是个玩笑。”</a:t>
             </a:r>
           </a:p>
         </p:txBody>
@@ -4795,7 +4795,7 @@
                 </a:solidFill>
                 <a:latin typeface="Nunito Sans"/>
               </a:rPr>
-              <a:t>如果迪伦是闹着玩的，就没事了吗？</a:t>
+              <a:t>如果这个男孩是闹着玩的，就没事了吗？</a:t>
             </a:r>
           </a:p>
           <a:p>
@@ -4820,7 +4820,7 @@
                 </a:solidFill>
                 <a:latin typeface="Nunito Sans"/>
               </a:rPr>
-              <a:t>看起来不是：迪伦并不想伤害人，大家也在笑。</a:t>
+              <a:t>看起来不是：这个男孩并不想伤害人，大家也在笑。</a:t>
             </a:r>
           </a:p>
           <a:p>
@@ -4845,7 +4845,7 @@
                 </a:solidFill>
                 <a:latin typeface="Nunito Sans"/>
               </a:rPr>
-              <a:t>但是陈在笑吗？他同意了吗？他的形象是属于他自己的。</a:t>
+              <a:t>但是这个同学在笑吗？他同意了吗？他的形象是属于他自己的。</a:t>
             </a:r>
           </a:p>
           <a:p>
@@ -4895,7 +4895,7 @@
                 </a:solidFill>
                 <a:latin typeface="Nunito Sans"/>
               </a:rPr>
-              <a:t>结论：意图并不能抹去伤害。未经许可发布视频，是不尊重陈。</a:t>
+              <a:t>结论：意图并不能抹去伤害。未经许可发布视频，是不尊重这个同学。</a:t>
             </a:r>
           </a:p>
         </p:txBody>
@@ -6670,7 +6670,7 @@
                 </a:solidFill>
                 <a:latin typeface="Nunito Sans"/>
               </a:rPr>
-              <a:t>有人把玛亚伦的一段私人语音截了图，发到了班级群里。十分钟里有六十个人看到了。</a:t>
+              <a:t>有人把一个女孩的一段私人语音截了图，发到了班级群里。十分钟里有六十个人看到了。</a:t>
             </a:r>
           </a:p>
         </p:txBody>
